--- a/examples/relatorio-de-projeto.pptx
+++ b/examples/relatorio-de-projeto.pptx
@@ -4972,7 +4972,7 @@
           <a:p>
             <a:pPr algn="l"/>
             <a:r>
-              <a:rPr sz="3400" b="1" i="0">
+              <a:rPr sz="2600" b="1" i="0">
                 <a:solidFill>
                   <a:srgbClr val="333333"/>
                 </a:solidFill>

--- a/examples/relatorio-de-projeto.pptx
+++ b/examples/relatorio-de-projeto.pptx
@@ -3473,8 +3473,8 @@
         </p:nvSpPr>
         <p:spPr>
           <a:xfrm>
-            <a:off x="731520" y="2194560"/>
-            <a:ext cx="10698480" cy="1463040"/>
+            <a:off x="731520" y="1920240"/>
+            <a:ext cx="10698480" cy="1737360"/>
           </a:xfrm>
           <a:prstGeom prst="rect">
             <a:avLst/>
@@ -3531,6 +3531,41 @@
                 <a:latin typeface="Calibri"/>
               </a:rPr>
               <a:t>Relatório de status - semana 34</a:t>
+            </a:r>
+          </a:p>
+        </p:txBody>
+      </p:sp>
+      <p:sp>
+        <p:nvSpPr>
+          <p:cNvPr id="5" name="TextBox 4"/>
+          <p:cNvSpPr txBox="1"/>
+          <p:nvPr/>
+        </p:nvSpPr>
+        <p:spPr>
+          <a:xfrm>
+            <a:off x="731520" y="5669280"/>
+            <a:ext cx="10698480" cy="457200"/>
+          </a:xfrm>
+          <a:prstGeom prst="rect">
+            <a:avLst/>
+          </a:prstGeom>
+          <a:noFill/>
+        </p:spPr>
+        <p:txBody>
+          <a:bodyPr wrap="square" anchor="t" lIns="45720" rIns="45720" tIns="27432" bIns="27432">
+            <a:spAutoFit/>
+          </a:bodyPr>
+          <a:lstStyle/>
+          <a:p>
+            <a:pPr algn="l"/>
+            <a:r>
+              <a:rPr sz="1300" b="0" i="0">
+                <a:solidFill>
+                  <a:srgbClr val="BFC9D4"/>
+                </a:solidFill>
+                <a:latin typeface="Calibri"/>
+              </a:rPr>
+              <a:t>2026-09-01</a:t>
             </a:r>
           </a:p>
         </p:txBody>
@@ -3594,8 +3629,8 @@
         </p:nvSpPr>
         <p:spPr>
           <a:xfrm>
-            <a:off x="10817352" y="6217920"/>
-            <a:ext cx="914400" cy="365760"/>
+            <a:off x="7772400" y="91440"/>
+            <a:ext cx="3959352" cy="228600"/>
           </a:xfrm>
           <a:prstGeom prst="rect">
             <a:avLst/>
@@ -3610,6 +3645,41 @@
           <a:p>
             <a:pPr algn="r"/>
             <a:r>
+              <a:rPr sz="900" b="0" i="0">
+                <a:solidFill>
+                  <a:srgbClr val="8C8C8C"/>
+                </a:solidFill>
+                <a:latin typeface="Calibri"/>
+              </a:rPr>
+              <a:t>2026-09-01</a:t>
+            </a:r>
+          </a:p>
+        </p:txBody>
+      </p:sp>
+      <p:sp>
+        <p:nvSpPr>
+          <p:cNvPr id="4" name="TextBox 3"/>
+          <p:cNvSpPr txBox="1"/>
+          <p:nvPr/>
+        </p:nvSpPr>
+        <p:spPr>
+          <a:xfrm>
+            <a:off x="10817352" y="6217920"/>
+            <a:ext cx="914400" cy="365760"/>
+          </a:xfrm>
+          <a:prstGeom prst="rect">
+            <a:avLst/>
+          </a:prstGeom>
+          <a:noFill/>
+        </p:spPr>
+        <p:txBody>
+          <a:bodyPr wrap="square" anchor="ctr" lIns="45720" rIns="45720" tIns="27432" bIns="27432">
+            <a:spAutoFit/>
+          </a:bodyPr>
+          <a:lstStyle/>
+          <a:p>
+            <a:pPr algn="r"/>
+            <a:r>
               <a:rPr sz="1000" b="0" i="0">
                 <a:solidFill>
                   <a:srgbClr val="8C8C8C"/>
@@ -3623,7 +3693,7 @@
       </p:sp>
       <p:sp>
         <p:nvSpPr>
-          <p:cNvPr id="4" name="Rectangle 3"/>
+          <p:cNvPr id="5" name="Rectangle 4"/>
           <p:cNvSpPr/>
           <p:nvPr/>
         </p:nvSpPr>
@@ -3667,7 +3737,7 @@
       </p:sp>
       <p:sp>
         <p:nvSpPr>
-          <p:cNvPr id="5" name="Rectangle 4"/>
+          <p:cNvPr id="6" name="Rectangle 5"/>
           <p:cNvSpPr/>
           <p:nvPr/>
         </p:nvSpPr>
@@ -3711,7 +3781,7 @@
       </p:sp>
       <p:sp>
         <p:nvSpPr>
-          <p:cNvPr id="6" name="TextBox 5"/>
+          <p:cNvPr id="7" name="TextBox 6"/>
           <p:cNvSpPr txBox="1"/>
           <p:nvPr/>
         </p:nvSpPr>
@@ -3746,7 +3816,7 @@
       </p:sp>
       <p:sp>
         <p:nvSpPr>
-          <p:cNvPr id="7" name="Oval 6"/>
+          <p:cNvPr id="8" name="Oval 7"/>
           <p:cNvSpPr/>
           <p:nvPr/>
         </p:nvSpPr>
@@ -3799,7 +3869,7 @@
       </p:sp>
       <p:sp>
         <p:nvSpPr>
-          <p:cNvPr id="8" name="TextBox 7"/>
+          <p:cNvPr id="9" name="TextBox 8"/>
           <p:cNvSpPr txBox="1"/>
           <p:nvPr/>
         </p:nvSpPr>
@@ -3834,7 +3904,7 @@
       </p:sp>
       <p:sp>
         <p:nvSpPr>
-          <p:cNvPr id="9" name="Oval 8"/>
+          <p:cNvPr id="10" name="Oval 9"/>
           <p:cNvSpPr/>
           <p:nvPr/>
         </p:nvSpPr>
@@ -3887,7 +3957,7 @@
       </p:sp>
       <p:sp>
         <p:nvSpPr>
-          <p:cNvPr id="10" name="TextBox 9"/>
+          <p:cNvPr id="11" name="TextBox 10"/>
           <p:cNvSpPr txBox="1"/>
           <p:nvPr/>
         </p:nvSpPr>
@@ -3922,7 +3992,7 @@
       </p:sp>
       <p:sp>
         <p:nvSpPr>
-          <p:cNvPr id="11" name="Oval 10"/>
+          <p:cNvPr id="12" name="Oval 11"/>
           <p:cNvSpPr/>
           <p:nvPr/>
         </p:nvSpPr>
@@ -3975,7 +4045,7 @@
       </p:sp>
       <p:sp>
         <p:nvSpPr>
-          <p:cNvPr id="12" name="TextBox 11"/>
+          <p:cNvPr id="13" name="TextBox 12"/>
           <p:cNvSpPr txBox="1"/>
           <p:nvPr/>
         </p:nvSpPr>
@@ -4010,7 +4080,7 @@
       </p:sp>
       <p:sp>
         <p:nvSpPr>
-          <p:cNvPr id="13" name="Rectangle 12"/>
+          <p:cNvPr id="14" name="Rectangle 13"/>
           <p:cNvSpPr/>
           <p:nvPr/>
         </p:nvSpPr>
@@ -4056,7 +4126,7 @@
       </p:sp>
       <p:sp>
         <p:nvSpPr>
-          <p:cNvPr id="14" name="TextBox 13"/>
+          <p:cNvPr id="15" name="TextBox 14"/>
           <p:cNvSpPr txBox="1"/>
           <p:nvPr/>
         </p:nvSpPr>
@@ -4166,8 +4236,8 @@
         </p:nvSpPr>
         <p:spPr>
           <a:xfrm>
-            <a:off x="10817352" y="6217920"/>
-            <a:ext cx="914400" cy="365760"/>
+            <a:off x="7772400" y="91440"/>
+            <a:ext cx="3959352" cy="228600"/>
           </a:xfrm>
           <a:prstGeom prst="rect">
             <a:avLst/>
@@ -4182,6 +4252,41 @@
           <a:p>
             <a:pPr algn="r"/>
             <a:r>
+              <a:rPr sz="900" b="0" i="0">
+                <a:solidFill>
+                  <a:srgbClr val="8C8C8C"/>
+                </a:solidFill>
+                <a:latin typeface="Calibri"/>
+              </a:rPr>
+              <a:t>2026-09-01</a:t>
+            </a:r>
+          </a:p>
+        </p:txBody>
+      </p:sp>
+      <p:sp>
+        <p:nvSpPr>
+          <p:cNvPr id="4" name="TextBox 3"/>
+          <p:cNvSpPr txBox="1"/>
+          <p:nvPr/>
+        </p:nvSpPr>
+        <p:spPr>
+          <a:xfrm>
+            <a:off x="10817352" y="6217920"/>
+            <a:ext cx="914400" cy="365760"/>
+          </a:xfrm>
+          <a:prstGeom prst="rect">
+            <a:avLst/>
+          </a:prstGeom>
+          <a:noFill/>
+        </p:spPr>
+        <p:txBody>
+          <a:bodyPr wrap="square" anchor="ctr" lIns="45720" rIns="45720" tIns="27432" bIns="27432">
+            <a:spAutoFit/>
+          </a:bodyPr>
+          <a:lstStyle/>
+          <a:p>
+            <a:pPr algn="r"/>
+            <a:r>
               <a:rPr sz="1000" b="0" i="0">
                 <a:solidFill>
                   <a:srgbClr val="8C8C8C"/>
@@ -4195,7 +4300,7 @@
       </p:sp>
       <p:sp>
         <p:nvSpPr>
-          <p:cNvPr id="4" name="Rectangle 3"/>
+          <p:cNvPr id="5" name="Rectangle 4"/>
           <p:cNvSpPr/>
           <p:nvPr/>
         </p:nvSpPr>
@@ -4239,7 +4344,7 @@
       </p:sp>
       <p:sp>
         <p:nvSpPr>
-          <p:cNvPr id="5" name="Rectangle 4"/>
+          <p:cNvPr id="6" name="Rectangle 5"/>
           <p:cNvSpPr/>
           <p:nvPr/>
         </p:nvSpPr>
@@ -4283,7 +4388,7 @@
       </p:sp>
       <p:sp>
         <p:nvSpPr>
-          <p:cNvPr id="6" name="TextBox 5"/>
+          <p:cNvPr id="7" name="TextBox 6"/>
           <p:cNvSpPr txBox="1"/>
           <p:nvPr/>
         </p:nvSpPr>
@@ -4318,7 +4423,7 @@
       </p:sp>
       <p:sp>
         <p:nvSpPr>
-          <p:cNvPr id="7" name="TextBox 6"/>
+          <p:cNvPr id="8" name="TextBox 7"/>
           <p:cNvSpPr txBox="1"/>
           <p:nvPr/>
         </p:nvSpPr>
@@ -4353,7 +4458,7 @@
       </p:sp>
       <p:sp>
         <p:nvSpPr>
-          <p:cNvPr id="8" name="Rectangle 7"/>
+          <p:cNvPr id="9" name="Rectangle 8"/>
           <p:cNvSpPr/>
           <p:nvPr/>
         </p:nvSpPr>
@@ -4397,7 +4502,7 @@
       </p:sp>
       <p:sp>
         <p:nvSpPr>
-          <p:cNvPr id="9" name="Rectangle 8"/>
+          <p:cNvPr id="10" name="Rectangle 9"/>
           <p:cNvSpPr/>
           <p:nvPr/>
         </p:nvSpPr>
@@ -4441,7 +4546,7 @@
       </p:sp>
       <p:sp>
         <p:nvSpPr>
-          <p:cNvPr id="10" name="TextBox 9"/>
+          <p:cNvPr id="11" name="TextBox 10"/>
           <p:cNvSpPr txBox="1"/>
           <p:nvPr/>
         </p:nvSpPr>
@@ -4476,7 +4581,7 @@
       </p:sp>
       <p:sp>
         <p:nvSpPr>
-          <p:cNvPr id="11" name="TextBox 10"/>
+          <p:cNvPr id="12" name="TextBox 11"/>
           <p:cNvSpPr txBox="1"/>
           <p:nvPr/>
         </p:nvSpPr>
@@ -4511,7 +4616,7 @@
       </p:sp>
       <p:sp>
         <p:nvSpPr>
-          <p:cNvPr id="12" name="Rectangle 11"/>
+          <p:cNvPr id="13" name="Rectangle 12"/>
           <p:cNvSpPr/>
           <p:nvPr/>
         </p:nvSpPr>
@@ -4555,7 +4660,7 @@
       </p:sp>
       <p:sp>
         <p:nvSpPr>
-          <p:cNvPr id="13" name="Rectangle 12"/>
+          <p:cNvPr id="14" name="Rectangle 13"/>
           <p:cNvSpPr/>
           <p:nvPr/>
         </p:nvSpPr>
@@ -4599,7 +4704,7 @@
       </p:sp>
       <p:sp>
         <p:nvSpPr>
-          <p:cNvPr id="14" name="TextBox 13"/>
+          <p:cNvPr id="15" name="TextBox 14"/>
           <p:cNvSpPr txBox="1"/>
           <p:nvPr/>
         </p:nvSpPr>
@@ -4634,7 +4739,7 @@
       </p:sp>
       <p:sp>
         <p:nvSpPr>
-          <p:cNvPr id="15" name="TextBox 14"/>
+          <p:cNvPr id="16" name="TextBox 15"/>
           <p:cNvSpPr txBox="1"/>
           <p:nvPr/>
         </p:nvSpPr>
@@ -4669,7 +4774,7 @@
       </p:sp>
       <p:sp>
         <p:nvSpPr>
-          <p:cNvPr id="16" name="Rectangle 15"/>
+          <p:cNvPr id="17" name="Rectangle 16"/>
           <p:cNvSpPr/>
           <p:nvPr/>
         </p:nvSpPr>
@@ -4713,7 +4818,7 @@
       </p:sp>
       <p:sp>
         <p:nvSpPr>
-          <p:cNvPr id="17" name="Rectangle 16"/>
+          <p:cNvPr id="18" name="Rectangle 17"/>
           <p:cNvSpPr/>
           <p:nvPr/>
         </p:nvSpPr>
@@ -4757,7 +4862,7 @@
       </p:sp>
       <p:sp>
         <p:nvSpPr>
-          <p:cNvPr id="18" name="TextBox 17"/>
+          <p:cNvPr id="19" name="TextBox 18"/>
           <p:cNvSpPr txBox="1"/>
           <p:nvPr/>
         </p:nvSpPr>
@@ -4792,7 +4897,7 @@
       </p:sp>
       <p:sp>
         <p:nvSpPr>
-          <p:cNvPr id="19" name="TextBox 18"/>
+          <p:cNvPr id="20" name="TextBox 19"/>
           <p:cNvSpPr txBox="1"/>
           <p:nvPr/>
         </p:nvSpPr>
@@ -4827,7 +4932,7 @@
       </p:sp>
       <p:sp>
         <p:nvSpPr>
-          <p:cNvPr id="20" name="Rectangle 19"/>
+          <p:cNvPr id="21" name="Rectangle 20"/>
           <p:cNvSpPr/>
           <p:nvPr/>
         </p:nvSpPr>
@@ -4871,7 +4976,7 @@
       </p:sp>
       <p:sp>
         <p:nvSpPr>
-          <p:cNvPr id="21" name="Rectangle 20"/>
+          <p:cNvPr id="22" name="Rectangle 21"/>
           <p:cNvSpPr/>
           <p:nvPr/>
         </p:nvSpPr>
@@ -4915,7 +5020,7 @@
       </p:sp>
       <p:sp>
         <p:nvSpPr>
-          <p:cNvPr id="22" name="TextBox 21"/>
+          <p:cNvPr id="23" name="TextBox 22"/>
           <p:cNvSpPr txBox="1"/>
           <p:nvPr/>
         </p:nvSpPr>
@@ -4950,7 +5055,7 @@
       </p:sp>
       <p:sp>
         <p:nvSpPr>
-          <p:cNvPr id="23" name="TextBox 22"/>
+          <p:cNvPr id="24" name="TextBox 23"/>
           <p:cNvSpPr txBox="1"/>
           <p:nvPr/>
         </p:nvSpPr>
@@ -5042,8 +5147,8 @@
         </p:nvSpPr>
         <p:spPr>
           <a:xfrm>
-            <a:off x="10817352" y="6217920"/>
-            <a:ext cx="914400" cy="365760"/>
+            <a:off x="7772400" y="91440"/>
+            <a:ext cx="3959352" cy="228600"/>
           </a:xfrm>
           <a:prstGeom prst="rect">
             <a:avLst/>
@@ -5058,6 +5163,41 @@
           <a:p>
             <a:pPr algn="r"/>
             <a:r>
+              <a:rPr sz="900" b="0" i="0">
+                <a:solidFill>
+                  <a:srgbClr val="8C8C8C"/>
+                </a:solidFill>
+                <a:latin typeface="Calibri"/>
+              </a:rPr>
+              <a:t>2026-09-01</a:t>
+            </a:r>
+          </a:p>
+        </p:txBody>
+      </p:sp>
+      <p:sp>
+        <p:nvSpPr>
+          <p:cNvPr id="4" name="TextBox 3"/>
+          <p:cNvSpPr txBox="1"/>
+          <p:nvPr/>
+        </p:nvSpPr>
+        <p:spPr>
+          <a:xfrm>
+            <a:off x="10817352" y="6217920"/>
+            <a:ext cx="914400" cy="365760"/>
+          </a:xfrm>
+          <a:prstGeom prst="rect">
+            <a:avLst/>
+          </a:prstGeom>
+          <a:noFill/>
+        </p:spPr>
+        <p:txBody>
+          <a:bodyPr wrap="square" anchor="ctr" lIns="45720" rIns="45720" tIns="27432" bIns="27432">
+            <a:spAutoFit/>
+          </a:bodyPr>
+          <a:lstStyle/>
+          <a:p>
+            <a:pPr algn="r"/>
+            <a:r>
               <a:rPr sz="1000" b="0" i="0">
                 <a:solidFill>
                   <a:srgbClr val="8C8C8C"/>
@@ -5071,7 +5211,7 @@
       </p:sp>
       <p:sp>
         <p:nvSpPr>
-          <p:cNvPr id="4" name="Rectangle 3"/>
+          <p:cNvPr id="5" name="Rectangle 4"/>
           <p:cNvSpPr/>
           <p:nvPr/>
         </p:nvSpPr>
@@ -5115,7 +5255,7 @@
       </p:sp>
       <p:sp>
         <p:nvSpPr>
-          <p:cNvPr id="5" name="Oval 4"/>
+          <p:cNvPr id="6" name="Oval 5"/>
           <p:cNvSpPr/>
           <p:nvPr/>
         </p:nvSpPr>
@@ -5161,7 +5301,7 @@
       </p:sp>
       <p:sp>
         <p:nvSpPr>
-          <p:cNvPr id="6" name="TextBox 5"/>
+          <p:cNvPr id="7" name="TextBox 6"/>
           <p:cNvSpPr txBox="1"/>
           <p:nvPr/>
         </p:nvSpPr>
@@ -5196,7 +5336,7 @@
       </p:sp>
       <p:sp>
         <p:nvSpPr>
-          <p:cNvPr id="7" name="TextBox 6"/>
+          <p:cNvPr id="8" name="TextBox 7"/>
           <p:cNvSpPr txBox="1"/>
           <p:nvPr/>
         </p:nvSpPr>
@@ -5231,7 +5371,7 @@
       </p:sp>
       <p:sp>
         <p:nvSpPr>
-          <p:cNvPr id="8" name="Oval 7"/>
+          <p:cNvPr id="9" name="Oval 8"/>
           <p:cNvSpPr/>
           <p:nvPr/>
         </p:nvSpPr>
@@ -5277,7 +5417,7 @@
       </p:sp>
       <p:sp>
         <p:nvSpPr>
-          <p:cNvPr id="9" name="TextBox 8"/>
+          <p:cNvPr id="10" name="TextBox 9"/>
           <p:cNvSpPr txBox="1"/>
           <p:nvPr/>
         </p:nvSpPr>
@@ -5312,7 +5452,7 @@
       </p:sp>
       <p:sp>
         <p:nvSpPr>
-          <p:cNvPr id="10" name="TextBox 9"/>
+          <p:cNvPr id="11" name="TextBox 10"/>
           <p:cNvSpPr txBox="1"/>
           <p:nvPr/>
         </p:nvSpPr>
@@ -5347,7 +5487,7 @@
       </p:sp>
       <p:sp>
         <p:nvSpPr>
-          <p:cNvPr id="11" name="Oval 10"/>
+          <p:cNvPr id="12" name="Oval 11"/>
           <p:cNvSpPr/>
           <p:nvPr/>
         </p:nvSpPr>
@@ -5393,7 +5533,7 @@
       </p:sp>
       <p:sp>
         <p:nvSpPr>
-          <p:cNvPr id="12" name="TextBox 11"/>
+          <p:cNvPr id="13" name="TextBox 12"/>
           <p:cNvSpPr txBox="1"/>
           <p:nvPr/>
         </p:nvSpPr>
@@ -5428,7 +5568,7 @@
       </p:sp>
       <p:sp>
         <p:nvSpPr>
-          <p:cNvPr id="13" name="TextBox 12"/>
+          <p:cNvPr id="14" name="TextBox 13"/>
           <p:cNvSpPr txBox="1"/>
           <p:nvPr/>
         </p:nvSpPr>
@@ -5463,7 +5603,7 @@
       </p:sp>
       <p:sp>
         <p:nvSpPr>
-          <p:cNvPr id="14" name="Oval 13"/>
+          <p:cNvPr id="15" name="Oval 14"/>
           <p:cNvSpPr/>
           <p:nvPr/>
         </p:nvSpPr>
@@ -5509,7 +5649,7 @@
       </p:sp>
       <p:sp>
         <p:nvSpPr>
-          <p:cNvPr id="15" name="TextBox 14"/>
+          <p:cNvPr id="16" name="TextBox 15"/>
           <p:cNvSpPr txBox="1"/>
           <p:nvPr/>
         </p:nvSpPr>
@@ -5544,7 +5684,7 @@
       </p:sp>
       <p:sp>
         <p:nvSpPr>
-          <p:cNvPr id="16" name="TextBox 15"/>
+          <p:cNvPr id="17" name="TextBox 16"/>
           <p:cNvSpPr txBox="1"/>
           <p:nvPr/>
         </p:nvSpPr>
@@ -5579,7 +5719,7 @@
       </p:sp>
       <p:sp>
         <p:nvSpPr>
-          <p:cNvPr id="17" name="Oval 16"/>
+          <p:cNvPr id="18" name="Oval 17"/>
           <p:cNvSpPr/>
           <p:nvPr/>
         </p:nvSpPr>
@@ -5623,7 +5763,7 @@
       </p:sp>
       <p:sp>
         <p:nvSpPr>
-          <p:cNvPr id="18" name="TextBox 17"/>
+          <p:cNvPr id="19" name="TextBox 18"/>
           <p:cNvSpPr txBox="1"/>
           <p:nvPr/>
         </p:nvSpPr>
@@ -5658,7 +5798,7 @@
       </p:sp>
       <p:sp>
         <p:nvSpPr>
-          <p:cNvPr id="19" name="Oval 18"/>
+          <p:cNvPr id="20" name="Oval 19"/>
           <p:cNvSpPr/>
           <p:nvPr/>
         </p:nvSpPr>
@@ -5702,7 +5842,7 @@
       </p:sp>
       <p:sp>
         <p:nvSpPr>
-          <p:cNvPr id="20" name="TextBox 19"/>
+          <p:cNvPr id="21" name="TextBox 20"/>
           <p:cNvSpPr txBox="1"/>
           <p:nvPr/>
         </p:nvSpPr>
@@ -5737,7 +5877,7 @@
       </p:sp>
       <p:sp>
         <p:nvSpPr>
-          <p:cNvPr id="21" name="Oval 20"/>
+          <p:cNvPr id="22" name="Oval 21"/>
           <p:cNvSpPr/>
           <p:nvPr/>
         </p:nvSpPr>
@@ -5781,7 +5921,7 @@
       </p:sp>
       <p:sp>
         <p:nvSpPr>
-          <p:cNvPr id="22" name="TextBox 21"/>
+          <p:cNvPr id="23" name="TextBox 22"/>
           <p:cNvSpPr txBox="1"/>
           <p:nvPr/>
         </p:nvSpPr>
@@ -5873,8 +6013,8 @@
         </p:nvSpPr>
         <p:spPr>
           <a:xfrm>
-            <a:off x="457200" y="6217920"/>
-            <a:ext cx="10360152" cy="365760"/>
+            <a:off x="7772400" y="91440"/>
+            <a:ext cx="3959352" cy="228600"/>
           </a:xfrm>
           <a:prstGeom prst="rect">
             <a:avLst/>
@@ -5887,15 +6027,15 @@
           </a:bodyPr>
           <a:lstStyle/>
           <a:p>
-            <a:pPr algn="l"/>
-            <a:r>
-              <a:rPr sz="1000" b="0" i="0">
+            <a:pPr algn="r"/>
+            <a:r>
+              <a:rPr sz="900" b="0" i="0">
                 <a:solidFill>
                   <a:srgbClr val="8C8C8C"/>
                 </a:solidFill>
                 <a:latin typeface="Calibri"/>
               </a:rPr>
-              <a:t>Fonte: Cronograma MS Project, base 01/09/2026</a:t>
+              <a:t>2026-09-01</a:t>
             </a:r>
           </a:p>
         </p:txBody>
@@ -5908,8 +6048,8 @@
         </p:nvSpPr>
         <p:spPr>
           <a:xfrm>
-            <a:off x="10817352" y="6217920"/>
-            <a:ext cx="914400" cy="365760"/>
+            <a:off x="457200" y="6217920"/>
+            <a:ext cx="8531352" cy="365760"/>
           </a:xfrm>
           <a:prstGeom prst="rect">
             <a:avLst/>
@@ -5922,6 +6062,41 @@
           </a:bodyPr>
           <a:lstStyle/>
           <a:p>
+            <a:pPr algn="l"/>
+            <a:r>
+              <a:rPr sz="1000" b="0" i="0">
+                <a:solidFill>
+                  <a:srgbClr val="8C8C8C"/>
+                </a:solidFill>
+                <a:latin typeface="Calibri"/>
+              </a:rPr>
+              <a:t>Fonte: Cronograma MS Project, base 01/09/2026</a:t>
+            </a:r>
+          </a:p>
+        </p:txBody>
+      </p:sp>
+      <p:sp>
+        <p:nvSpPr>
+          <p:cNvPr id="5" name="TextBox 4"/>
+          <p:cNvSpPr txBox="1"/>
+          <p:nvPr/>
+        </p:nvSpPr>
+        <p:spPr>
+          <a:xfrm>
+            <a:off x="10817352" y="6217920"/>
+            <a:ext cx="914400" cy="365760"/>
+          </a:xfrm>
+          <a:prstGeom prst="rect">
+            <a:avLst/>
+          </a:prstGeom>
+          <a:noFill/>
+        </p:spPr>
+        <p:txBody>
+          <a:bodyPr wrap="square" anchor="ctr" lIns="45720" rIns="45720" tIns="27432" bIns="27432">
+            <a:spAutoFit/>
+          </a:bodyPr>
+          <a:lstStyle/>
+          <a:p>
             <a:pPr algn="r"/>
             <a:r>
               <a:rPr sz="1000" b="0" i="0">
@@ -5937,7 +6112,7 @@
       </p:sp>
       <p:graphicFrame>
         <p:nvGraphicFramePr>
-          <p:cNvPr id="5" name="Chart 4"/>
+          <p:cNvPr id="6" name="Chart 5"/>
           <p:cNvGraphicFramePr>
             <a:graphicFrameLocks noGrp="1"/>
           </p:cNvGraphicFramePr>
@@ -6012,8 +6187,8 @@
         </p:nvSpPr>
         <p:spPr>
           <a:xfrm>
-            <a:off x="10817352" y="6217920"/>
-            <a:ext cx="914400" cy="365760"/>
+            <a:off x="7772400" y="91440"/>
+            <a:ext cx="3959352" cy="228600"/>
           </a:xfrm>
           <a:prstGeom prst="rect">
             <a:avLst/>
@@ -6028,6 +6203,41 @@
           <a:p>
             <a:pPr algn="r"/>
             <a:r>
+              <a:rPr sz="900" b="0" i="0">
+                <a:solidFill>
+                  <a:srgbClr val="8C8C8C"/>
+                </a:solidFill>
+                <a:latin typeface="Calibri"/>
+              </a:rPr>
+              <a:t>2026-09-01</a:t>
+            </a:r>
+          </a:p>
+        </p:txBody>
+      </p:sp>
+      <p:sp>
+        <p:nvSpPr>
+          <p:cNvPr id="4" name="TextBox 3"/>
+          <p:cNvSpPr txBox="1"/>
+          <p:nvPr/>
+        </p:nvSpPr>
+        <p:spPr>
+          <a:xfrm>
+            <a:off x="10817352" y="6217920"/>
+            <a:ext cx="914400" cy="365760"/>
+          </a:xfrm>
+          <a:prstGeom prst="rect">
+            <a:avLst/>
+          </a:prstGeom>
+          <a:noFill/>
+        </p:spPr>
+        <p:txBody>
+          <a:bodyPr wrap="square" anchor="ctr" lIns="45720" rIns="45720" tIns="27432" bIns="27432">
+            <a:spAutoFit/>
+          </a:bodyPr>
+          <a:lstStyle/>
+          <a:p>
+            <a:pPr algn="r"/>
+            <a:r>
               <a:rPr sz="1000" b="0" i="0">
                 <a:solidFill>
                   <a:srgbClr val="8C8C8C"/>
@@ -6041,7 +6251,7 @@
       </p:sp>
       <p:graphicFrame>
         <p:nvGraphicFramePr>
-          <p:cNvPr id="4" name="Table 3"/>
+          <p:cNvPr id="5" name="Table 4"/>
           <p:cNvGraphicFramePr>
             <a:graphicFrameLocks noGrp="1"/>
           </p:cNvGraphicFramePr>
@@ -6478,8 +6688,8 @@
         </p:nvSpPr>
         <p:spPr>
           <a:xfrm>
-            <a:off x="10817352" y="6217920"/>
-            <a:ext cx="914400" cy="365760"/>
+            <a:off x="7772400" y="91440"/>
+            <a:ext cx="3959352" cy="228600"/>
           </a:xfrm>
           <a:prstGeom prst="rect">
             <a:avLst/>
@@ -6494,6 +6704,41 @@
           <a:p>
             <a:pPr algn="r"/>
             <a:r>
+              <a:rPr sz="900" b="0" i="0">
+                <a:solidFill>
+                  <a:srgbClr val="8C8C8C"/>
+                </a:solidFill>
+                <a:latin typeface="Calibri"/>
+              </a:rPr>
+              <a:t>2026-09-01</a:t>
+            </a:r>
+          </a:p>
+        </p:txBody>
+      </p:sp>
+      <p:sp>
+        <p:nvSpPr>
+          <p:cNvPr id="4" name="TextBox 3"/>
+          <p:cNvSpPr txBox="1"/>
+          <p:nvPr/>
+        </p:nvSpPr>
+        <p:spPr>
+          <a:xfrm>
+            <a:off x="10817352" y="6217920"/>
+            <a:ext cx="914400" cy="365760"/>
+          </a:xfrm>
+          <a:prstGeom prst="rect">
+            <a:avLst/>
+          </a:prstGeom>
+          <a:noFill/>
+        </p:spPr>
+        <p:txBody>
+          <a:bodyPr wrap="square" anchor="ctr" lIns="45720" rIns="45720" tIns="27432" bIns="27432">
+            <a:spAutoFit/>
+          </a:bodyPr>
+          <a:lstStyle/>
+          <a:p>
+            <a:pPr algn="r"/>
+            <a:r>
               <a:rPr sz="1000" b="0" i="0">
                 <a:solidFill>
                   <a:srgbClr val="8C8C8C"/>
@@ -6507,7 +6752,7 @@
       </p:sp>
       <p:graphicFrame>
         <p:nvGraphicFramePr>
-          <p:cNvPr id="4" name="Table 3"/>
+          <p:cNvPr id="5" name="Table 4"/>
           <p:cNvGraphicFramePr>
             <a:graphicFrameLocks noGrp="1"/>
           </p:cNvGraphicFramePr>

--- a/examples/relatorio-de-projeto.pptx
+++ b/examples/relatorio-de-projeto.pptx
@@ -6112,7 +6112,7 @@
       </p:sp>
       <p:graphicFrame>
         <p:nvGraphicFramePr>
-          <p:cNvPr id="6" name="Chart 5"/>
+          <p:cNvPr id="6" name="Chart 5" descr="Avanço físico de 62% vs. 68% planejado"/>
           <p:cNvGraphicFramePr>
             <a:graphicFrameLocks noGrp="1"/>
           </p:cNvGraphicFramePr>
